--- a/dglobal/PhaseShift_TIB_DEMODAY_20260906_rev2.pptx
+++ b/dglobal/PhaseShift_TIB_DEMODAY_20260906_rev2.pptx
@@ -6004,7 +6004,7 @@
             </a:r>
             <a:br/>
             <a:r>
-              <a:t>・847万円 / 拠点・年（専用ポリマー定期購入）</a:t>
+              <a:t>・847万円 / 拠点・年（ポリマー定期購入＋保守）</a:t>
             </a:r>
             <a:br/>
             <a:br/>
